--- a/new-app/docs/Solution-Diagram.pptx
+++ b/new-app/docs/Solution-Diagram.pptx
@@ -4460,7 +4460,8 @@
               </a:rPr>
               <a:t>Keep or remove
 Fill amounts
-Add bookmarks</a:t>
+Add bookmarks
+Optional date and HCE retype</a:t>
             </a:r>
           </a:p>
         </p:txBody>
@@ -4782,7 +4783,7 @@
                 </a:solidFill>
                 <a:latin typeface="Calibri"/>
               </a:rPr>
-              <a:t>Reviewer checks the preview, downloads the PDF, and sends the email draft.</a:t>
+              <a:t>Reviewer previews with highlights on or off, downloads the clean PDF, and sends the email draft.</a:t>
             </a:r>
           </a:p>
           <a:p>
@@ -6129,7 +6130,7 @@
                 </a:solidFill>
                 <a:latin typeface="Calibri"/>
               </a:rPr>
-              <a:t>Prior-year HCE percent and off-calendar 402(g) dates stay on the source PDFs. Non-PDF files are not converted.</a:t>
+              <a:t>Cover day, HCE %, and off-calendar 402(g) dates change only when Retype dates and HCE % is checked. Non-PDF files are not converted.</a:t>
             </a:r>
           </a:p>
         </p:txBody>
